--- a/modulo-03/03.01 - Explorando a Modelagem de Dados no ABAP/03.01_Explorando_a_modelagem_de_dados_no_ABAP.pptx
+++ b/modulo-03/03.01 - Explorando a Modelagem de Dados no ABAP/03.01_Explorando_a_modelagem_de_dados_no_ABAP.pptx
@@ -1728,7 +1728,7 @@
                   <a:srgbClr val="8FA3C7"/>
                 </a:solidFill>
               </a:rPr>
-              <a:t>ABAP Moderno · Módulo 02 — Modelagem de Dados com Dicionário e CDS  ·  Aula 1 de 7 — Modelagem no ABAP</a:t>
+              <a:t>ABAP Moderno · Módulo 03 — Modelagem de Dados com Dicionário e CDS  ·  Aula 1 de 7 — Modelagem no ABAP</a:t>
             </a:r>
             <a:endParaRPr lang="en-US" sz="900" dirty="0"/>
           </a:p>
@@ -1874,7 +1874,7 @@
                   <a:srgbClr val="556B82"/>
                 </a:solidFill>
               </a:rPr>
-              <a:t>ABAP Moderno · Módulo 02 — Modelagem de Dados com Dicionário e CDS  ·  Aula 1 de 7 — Modelagem no ABAP</a:t>
+              <a:t>ABAP Moderno · Módulo 03 — Modelagem de Dados com Dicionário e CDS  ·  Aula 1 de 7 — Modelagem no ABAP</a:t>
             </a:r>
             <a:endParaRPr lang="en-US" sz="900" dirty="0"/>
           </a:p>
@@ -2305,7 +2305,7 @@
                   <a:srgbClr val="89D1FF"/>
                 </a:solidFill>
               </a:rPr>
-              <a:t>MÓDULO 02 · AULA 01 DE 07</a:t>
+              <a:t>MÓDULO 03 · AULA 01 DE 07</a:t>
             </a:r>
             <a:endParaRPr lang="en-US" sz="1400" dirty="0"/>
           </a:p>
@@ -2647,7 +2647,7 @@
                   <a:srgbClr val="8FA3C7"/>
                 </a:solidFill>
               </a:rPr>
-              <a:t>ABAP Moderno · Módulo 02 — Modelagem de Dados com Dicionário e CDS · Design System SAP Horizon</a:t>
+              <a:t>ABAP Moderno · Módulo 03 — Modelagem de Dados com Dicionário e CDS · Design System SAP Horizon</a:t>
             </a:r>
             <a:endParaRPr lang="en-US" sz="1100" dirty="0"/>
           </a:p>
@@ -3072,7 +3072,7 @@
                             <a:srgbClr val="1D2D3E"/>
                           </a:solidFill>
                         </a:rPr>
-                        <a:t>Um papel CDS com condições de acesso avaliadas a cada leitura (aula 04.06)</a:t>
+                        <a:t>Um papel CDS com condições de acesso avaliadas a cada leitura (aula 02.06)</a:t>
                       </a:r>
                       <a:endParaRPr lang="en-US" sz="1200" dirty="0"/>
                     </a:p>
@@ -3160,7 +3160,7 @@
                             <a:srgbClr val="1D2D3E"/>
                           </a:solidFill>
                         </a:rPr>
-                        <a:t>Anotações de uma entidade guardadas fora da data definition (aula 02.07)</a:t>
+                        <a:t>Anotações de uma entidade guardadas fora da data definition (aula 03.07)</a:t>
                       </a:r>
                       <a:endParaRPr lang="en-US" sz="1200" dirty="0"/>
                     </a:p>
@@ -3510,7 +3510,7 @@
                   <a:srgbClr val="89D1FF"/>
                 </a:solidFill>
               </a:rPr>
-              <a:t>AULA 02.01 · SEÇÃO 3</a:t>
+              <a:t>AULA 03.01 · SEÇÃO 3</a:t>
             </a:r>
             <a:endParaRPr lang="en-US" sz="1300" dirty="0"/>
           </a:p>
@@ -4533,7 +4533,7 @@
                 <a:ea typeface="Courier New" pitchFamily="34" charset="-122"/>
                 <a:cs typeface="Courier New" pitchFamily="34" charset="-120"/>
               </a:rPr>
-              <a:t>/DMO/R_AgencyTP</a:t>
+              <a:t>ZR_PC_PEDIDO</a:t>
             </a:r>
             <a:r>
               <a:rPr lang="en-US" sz="1200" dirty="0">
@@ -4541,7 +4541,7 @@
                   <a:srgbClr val="556B82"/>
                 </a:solidFill>
               </a:rPr>
-              <a:t>.</a:t>
+              <a:t> do projeto.</a:t>
             </a:r>
             <a:endParaRPr lang="en-US" sz="1400" dirty="0"/>
           </a:p>
@@ -4658,7 +4658,7 @@
                   <a:srgbClr val="556B82"/>
                 </a:solidFill>
               </a:rPr>
-              <a:t>, ponto oficial para estender views da SAP (aula 02.07).</a:t>
+              <a:t>, ponto oficial para estender views da SAP (aula 03.07).</a:t>
             </a:r>
             <a:endParaRPr lang="en-US" sz="1400" dirty="0"/>
           </a:p>
@@ -4827,7 +4827,7 @@
         </p:blipFill>
         <p:spPr>
           <a:xfrm>
-            <a:off x="7351205" y="2084832"/>
+            <a:off x="4474731" y="2084832"/>
             <a:ext cx="365760" cy="365760"/>
           </a:xfrm>
           <a:prstGeom prst="rect">
@@ -4875,7 +4875,7 @@
         </p:blipFill>
         <p:spPr>
           <a:xfrm>
-            <a:off x="4474731" y="2084832"/>
+            <a:off x="7351205" y="2084832"/>
             <a:ext cx="365760" cy="365760"/>
           </a:xfrm>
           <a:prstGeom prst="rect">
@@ -4923,7 +4923,7 @@
         </p:blipFill>
         <p:spPr>
           <a:xfrm>
-            <a:off x="820034" y="3928994"/>
+            <a:off x="8368711" y="3928994"/>
             <a:ext cx="225308" cy="225308"/>
           </a:xfrm>
           <a:prstGeom prst="rect">
@@ -4971,7 +4971,7 @@
         </p:blipFill>
         <p:spPr>
           <a:xfrm>
-            <a:off x="8368711" y="3928994"/>
+            <a:off x="820034" y="3928994"/>
             <a:ext cx="225308" cy="225308"/>
           </a:xfrm>
           <a:prstGeom prst="rect">
@@ -5115,7 +5115,7 @@
                   <a:srgbClr val="FFFFFF"/>
                 </a:solidFill>
               </a:rPr>
-              <a:t>O que aprendemos na aula 02.01</a:t>
+              <a:t>O que aprendemos na aula 03.01</a:t>
             </a:r>
             <a:endParaRPr lang="en-US" sz="3200" dirty="0"/>
           </a:p>
@@ -5664,7 +5664,7 @@
                   <a:srgbClr val="89D1FF"/>
                 </a:solidFill>
               </a:rPr>
-              <a:t>Próxima aula · 02.02  </a:t>
+              <a:t>Próxima aula · 03.02  </a:t>
             </a:r>
             <a:r>
               <a:rPr lang="en-US" sz="1500" dirty="0">
@@ -5742,7 +5742,7 @@
         </p:blipFill>
         <p:spPr>
           <a:xfrm>
-            <a:off x="822960" y="2926080"/>
+            <a:off x="6355080" y="2926080"/>
             <a:ext cx="256032" cy="256032"/>
           </a:xfrm>
           <a:prstGeom prst="rect">
@@ -5766,7 +5766,7 @@
         </p:blipFill>
         <p:spPr>
           <a:xfrm>
-            <a:off x="822960" y="3886200"/>
+            <a:off x="822960" y="2926080"/>
             <a:ext cx="256032" cy="256032"/>
           </a:xfrm>
           <a:prstGeom prst="rect">
@@ -5790,7 +5790,7 @@
         </p:blipFill>
         <p:spPr>
           <a:xfrm>
-            <a:off x="6355080" y="2926080"/>
+            <a:off x="822960" y="3886200"/>
             <a:ext cx="256032" cy="256032"/>
           </a:xfrm>
           <a:prstGeom prst="rect">
@@ -5941,7 +5941,7 @@
                   <a:srgbClr val="1D2D3E"/>
                 </a:solidFill>
               </a:rPr>
-              <a:t>Módulo 02 em 7 aulas: Dicionário e CDS</a:t>
+              <a:t>Módulo 03 em 7 aulas: Dicionário e CDS</a:t>
             </a:r>
             <a:endParaRPr lang="en-US" sz="2800" dirty="0"/>
           </a:p>
@@ -7221,7 +7221,7 @@
         </p:blipFill>
         <p:spPr>
           <a:xfrm>
-            <a:off x="2636444" y="1847088"/>
+            <a:off x="5455768" y="3858768"/>
             <a:ext cx="347472" cy="347472"/>
           </a:xfrm>
           <a:prstGeom prst="rect">
@@ -7245,7 +7245,7 @@
         </p:blipFill>
         <p:spPr>
           <a:xfrm>
-            <a:off x="5455768" y="1847088"/>
+            <a:off x="2636444" y="1847088"/>
             <a:ext cx="347472" cy="347472"/>
           </a:xfrm>
           <a:prstGeom prst="rect">
@@ -7269,7 +7269,7 @@
         </p:blipFill>
         <p:spPr>
           <a:xfrm>
-            <a:off x="11094415" y="1847088"/>
+            <a:off x="5455768" y="1847088"/>
             <a:ext cx="347472" cy="347472"/>
           </a:xfrm>
           <a:prstGeom prst="rect">
@@ -7317,7 +7317,7 @@
         </p:blipFill>
         <p:spPr>
           <a:xfrm>
-            <a:off x="5455768" y="3858768"/>
+            <a:off x="11094415" y="1847088"/>
             <a:ext cx="347472" cy="347472"/>
           </a:xfrm>
           <a:prstGeom prst="rect">
@@ -7365,8 +7365,8 @@
         </p:blipFill>
         <p:spPr>
           <a:xfrm>
-            <a:off x="8275091" y="3858768"/>
-            <a:ext cx="347472" cy="347472"/>
+            <a:off x="749808" y="5751576"/>
+            <a:ext cx="310896" cy="310896"/>
           </a:xfrm>
           <a:prstGeom prst="rect">
             <a:avLst/>
@@ -7389,8 +7389,8 @@
         </p:blipFill>
         <p:spPr>
           <a:xfrm>
-            <a:off x="749808" y="5751576"/>
-            <a:ext cx="310896" cy="310896"/>
+            <a:off x="8275091" y="3858768"/>
+            <a:ext cx="347472" cy="347472"/>
           </a:xfrm>
           <a:prstGeom prst="rect">
             <a:avLst/>
@@ -7950,7 +7950,7 @@
                 <a:ea typeface="Courier New" pitchFamily="34" charset="-122"/>
                 <a:cs typeface="Courier New" pitchFamily="34" charset="-120"/>
               </a:rPr>
-              <a:t>zflight</a:t>
+              <a:t>zta_pc_pedido</a:t>
             </a:r>
             <a:r>
               <a:rPr lang="en-US" sz="1050" dirty="0">
@@ -8049,7 +8049,7 @@
                 <a:ea typeface="Courier New" pitchFamily="34" charset="-122"/>
                 <a:cs typeface="Courier New" pitchFamily="34" charset="-120"/>
               </a:rPr>
-              <a:t>flights</a:t>
+              <a:t>pedidos</a:t>
             </a:r>
             <a:r>
               <a:rPr lang="en-US" sz="1050" dirty="0">
@@ -8155,7 +8155,7 @@
                 <a:ea typeface="Courier New" pitchFamily="34" charset="-122"/>
                 <a:cs typeface="Courier New" pitchFamily="34" charset="-120"/>
               </a:rPr>
-              <a:t>flights</a:t>
+              <a:t>pedidos</a:t>
             </a:r>
             <a:r>
               <a:rPr lang="en-US" sz="1050" dirty="0">
@@ -8221,7 +8221,7 @@
                 <a:ea typeface="Courier New" pitchFamily="34" charset="-122"/>
                 <a:cs typeface="Courier New" pitchFamily="34" charset="-120"/>
               </a:rPr>
-              <a:t>flight</a:t>
+              <a:t>pedido</a:t>
             </a:r>
             <a:r>
               <a:rPr lang="en-US" sz="1050" dirty="0">
@@ -8329,7 +8329,7 @@
                 <a:ea typeface="Courier New" pitchFamily="34" charset="-122"/>
                 <a:cs typeface="Courier New" pitchFamily="34" charset="-120"/>
               </a:rPr>
-              <a:t>flight-price</a:t>
+              <a:t>pedido-valor_total</a:t>
             </a:r>
             <a:r>
               <a:rPr lang="en-US" sz="1050" dirty="0">
@@ -8778,7 +8778,7 @@
                 <a:ea typeface="Courier New" pitchFamily="34" charset="-122"/>
                 <a:cs typeface="Courier New" pitchFamily="34" charset="-120"/>
               </a:rPr>
-              <a:t>zflight</a:t>
+              <a:t>zta_pc_pedido</a:t>
             </a:r>
             <a:endParaRPr lang="en-US" sz="1050" dirty="0"/>
           </a:p>
@@ -8831,7 +8831,7 @@
                 <a:ea typeface="Courier New" pitchFamily="34" charset="-122"/>
                 <a:cs typeface="Courier New" pitchFamily="34" charset="-120"/>
               </a:rPr>
-              <a:t>currency_code</a:t>
+              <a:t>currency</a:t>
             </a:r>
             <a:r>
               <a:rPr lang="en-US" sz="1050" dirty="0">
@@ -8897,7 +8897,7 @@
                 <a:ea typeface="Courier New" pitchFamily="34" charset="-122"/>
                 <a:cs typeface="Courier New" pitchFamily="34" charset="-120"/>
               </a:rPr>
-              <a:t>price</a:t>
+              <a:t>valor_total</a:t>
             </a:r>
             <a:r>
               <a:rPr lang="en-US" sz="1050" dirty="0">
@@ -9038,7 +9038,7 @@
                 <a:ea typeface="Courier New" pitchFamily="34" charset="-122"/>
                 <a:cs typeface="Courier New" pitchFamily="34" charset="-120"/>
               </a:rPr>
-              <a:t>currency_code</a:t>
+              <a:t>currency</a:t>
             </a:r>
             <a:endParaRPr lang="en-US" sz="1050" dirty="0"/>
           </a:p>
@@ -9348,7 +9348,7 @@
                   <a:srgbClr val="89D1FF"/>
                 </a:solidFill>
               </a:rPr>
-              <a:t>AULA 02.01 · SEÇÃO 1</a:t>
+              <a:t>AULA 03.01 · SEÇÃO 1</a:t>
             </a:r>
             <a:endParaRPr lang="en-US" sz="1300" dirty="0"/>
           </a:p>
@@ -10447,7 +10447,7 @@
         </p:blipFill>
         <p:spPr>
           <a:xfrm>
-            <a:off x="850392" y="2661412"/>
+            <a:off x="8399069" y="2661412"/>
             <a:ext cx="256032" cy="256032"/>
           </a:xfrm>
           <a:prstGeom prst="rect">
@@ -10471,8 +10471,8 @@
         </p:blipFill>
         <p:spPr>
           <a:xfrm>
-            <a:off x="749808" y="5019548"/>
-            <a:ext cx="310896" cy="310896"/>
+            <a:off x="850392" y="2661412"/>
+            <a:ext cx="256032" cy="256032"/>
           </a:xfrm>
           <a:prstGeom prst="rect">
             <a:avLst/>
@@ -10495,8 +10495,8 @@
         </p:blipFill>
         <p:spPr>
           <a:xfrm>
-            <a:off x="8399069" y="2661412"/>
-            <a:ext cx="256032" cy="256032"/>
+            <a:off x="749808" y="5019548"/>
+            <a:ext cx="310896" cy="310896"/>
           </a:xfrm>
           <a:prstGeom prst="rect">
             <a:avLst/>
@@ -11401,7 +11401,7 @@
                             <a:srgbClr val="1D2D3E"/>
                           </a:solidFill>
                         </a:rPr>
-                        <a:t>Tipos compostos globais (aula 02.03)</a:t>
+                        <a:t>Tipos compostos globais (aula 03.03)</a:t>
                       </a:r>
                       <a:endParaRPr lang="en-US" sz="1200" dirty="0"/>
                     </a:p>
@@ -12011,7 +12011,7 @@
                   <a:srgbClr val="89D1FF"/>
                 </a:solidFill>
               </a:rPr>
-              <a:t>AULA 02.01 · SEÇÃO 2</a:t>
+              <a:t>AULA 03.01 · SEÇÃO 2</a:t>
             </a:r>
             <a:endParaRPr lang="en-US" sz="1300" dirty="0"/>
           </a:p>
@@ -13007,8 +13007,8 @@
         </p:blipFill>
         <p:spPr>
           <a:xfrm>
-            <a:off x="6562192" y="2684907"/>
-            <a:ext cx="256032" cy="256032"/>
+            <a:off x="749808" y="5069205"/>
+            <a:ext cx="310896" cy="310896"/>
           </a:xfrm>
           <a:prstGeom prst="rect">
             <a:avLst/>
@@ -13031,8 +13031,8 @@
         </p:blipFill>
         <p:spPr>
           <a:xfrm>
-            <a:off x="749808" y="5069205"/>
-            <a:ext cx="310896" cy="310896"/>
+            <a:off x="6562192" y="2684907"/>
+            <a:ext cx="256032" cy="256032"/>
           </a:xfrm>
           <a:prstGeom prst="rect">
             <a:avLst/>
@@ -13267,7 +13267,7 @@
         <p:spPr>
           <a:xfrm>
             <a:off x="640080" y="1700784"/>
-            <a:ext cx="2386584" cy="292608"/>
+            <a:ext cx="2619756" cy="292608"/>
           </a:xfrm>
           <a:prstGeom prst="rect">
             <a:avLst/>
@@ -13287,7 +13287,7 @@
         <p:spPr>
           <a:xfrm>
             <a:off x="640080" y="1700784"/>
-            <a:ext cx="2386584" cy="27432"/>
+            <a:ext cx="2619756" cy="27432"/>
           </a:xfrm>
           <a:prstGeom prst="rect">
             <a:avLst/>
@@ -13307,7 +13307,7 @@
         <p:spPr>
           <a:xfrm>
             <a:off x="731520" y="1719072"/>
-            <a:ext cx="2203704" cy="274320"/>
+            <a:ext cx="2436876" cy="274320"/>
           </a:xfrm>
           <a:prstGeom prst="rect">
             <a:avLst/>
@@ -13328,7 +13328,7 @@
                   <a:srgbClr val="FFFFFF"/>
                 </a:solidFill>
               </a:rPr>
-              <a:t>z00_c_employee.ddls.asddls</a:t>
+              <a:t>zr_pc_item_pedido.ddls.asddls</a:t>
             </a:r>
             <a:endParaRPr lang="en-US" sz="950" dirty="0"/>
           </a:p>
@@ -13364,7 +13364,7 @@
                   <a:srgbClr val="9DA5B4"/>
                 </a:solidFill>
               </a:rPr>
-              <a:t>ZS4D430_## › Core Data Services › Z00_C_EMPLOYEE</a:t>
+              <a:t>ZAVBS_PC_PEDIDOS › ZR_PC_ITEM_PEDIDO (simplificada)</a:t>
             </a:r>
             <a:endParaRPr lang="en-US" sz="850" dirty="0"/>
           </a:p>
@@ -13774,7 +13774,7 @@
                 <a:ea typeface="Courier New" pitchFamily="34" charset="-122"/>
                 <a:cs typeface="Courier New" pitchFamily="34" charset="-120"/>
               </a:rPr>
-              <a:t>'Employee'</a:t>
+              <a:t>'Item do pedido - BO child'</a:t>
             </a:r>
             <a:endParaRPr lang="en-US" sz="1050" dirty="0"/>
           </a:p>
@@ -13794,7 +13794,7 @@
                 <a:ea typeface="Courier New" pitchFamily="34" charset="-122"/>
                 <a:cs typeface="Courier New" pitchFamily="34" charset="-120"/>
               </a:rPr>
-              <a:t>@Metadata.allowExtensions</a:t>
+              <a:t>@Metadata.ignorePropagatedAnnotations</a:t>
             </a:r>
             <a:r>
               <a:rPr lang="en-US" sz="1050" dirty="0">
@@ -13913,7 +13913,7 @@
                 <a:ea typeface="Courier New" pitchFamily="34" charset="-122"/>
                 <a:cs typeface="Courier New" pitchFamily="34" charset="-120"/>
               </a:rPr>
-              <a:t>Z00_C_Employee</a:t>
+              <a:t>ZR_PC_ITEM_PEDIDO</a:t>
             </a:r>
             <a:endParaRPr lang="en-US" sz="1050" dirty="0"/>
           </a:p>
@@ -14010,7 +14010,7 @@
                 <a:ea typeface="Courier New" pitchFamily="34" charset="-122"/>
                 <a:cs typeface="Courier New" pitchFamily="34" charset="-120"/>
               </a:rPr>
-              <a:t>z00_employ</a:t>
+              <a:t>zta_pc_item_ped</a:t>
             </a:r>
             <a:endParaRPr lang="en-US" sz="1050" dirty="0"/>
           </a:p>
@@ -14083,7 +14083,7 @@
                 <a:ea typeface="Courier New" pitchFamily="34" charset="-122"/>
                 <a:cs typeface="Courier New" pitchFamily="34" charset="-120"/>
               </a:rPr>
-              <a:t>employee_id</a:t>
+              <a:t>item_pedido_uuid</a:t>
             </a:r>
             <a:r>
               <a:rPr lang="en-US" sz="1050" dirty="0">
@@ -14094,7 +14094,7 @@
                 <a:ea typeface="Courier New" pitchFamily="34" charset="-122"/>
                 <a:cs typeface="Courier New" pitchFamily="34" charset="-120"/>
               </a:rPr>
-              <a:t>   </a:t>
+              <a:t>    </a:t>
             </a:r>
             <a:r>
               <a:rPr lang="en-US" sz="1050" dirty="0">
@@ -14127,7 +14127,7 @@
                 <a:ea typeface="Courier New" pitchFamily="34" charset="-122"/>
                 <a:cs typeface="Courier New" pitchFamily="34" charset="-120"/>
               </a:rPr>
-              <a:t>EmployeeId</a:t>
+              <a:t>ItemPedidoUUID</a:t>
             </a:r>
             <a:r>
               <a:rPr lang="en-US" sz="1050" dirty="0">
@@ -14169,7 +14169,7 @@
                 <a:ea typeface="Courier New" pitchFamily="34" charset="-122"/>
                 <a:cs typeface="Courier New" pitchFamily="34" charset="-120"/>
               </a:rPr>
-              <a:t>first_name</a:t>
+              <a:t>pedido_uuid</a:t>
             </a:r>
             <a:r>
               <a:rPr lang="en-US" sz="1050" dirty="0">
@@ -14180,7 +14180,7 @@
                 <a:ea typeface="Courier New" pitchFamily="34" charset="-122"/>
                 <a:cs typeface="Courier New" pitchFamily="34" charset="-120"/>
               </a:rPr>
-              <a:t>    </a:t>
+              <a:t>         </a:t>
             </a:r>
             <a:r>
               <a:rPr lang="en-US" sz="1050" dirty="0">
@@ -14213,7 +14213,7 @@
                 <a:ea typeface="Courier New" pitchFamily="34" charset="-122"/>
                 <a:cs typeface="Courier New" pitchFamily="34" charset="-120"/>
               </a:rPr>
-              <a:t>FirstName</a:t>
+              <a:t>PedidoUUID</a:t>
             </a:r>
             <a:r>
               <a:rPr lang="en-US" sz="1050" dirty="0">
@@ -14255,7 +14255,7 @@
                 <a:ea typeface="Courier New" pitchFamily="34" charset="-122"/>
                 <a:cs typeface="Courier New" pitchFamily="34" charset="-120"/>
               </a:rPr>
-              <a:t>last_name</a:t>
+              <a:t>qtde_item_pedido</a:t>
             </a:r>
             <a:r>
               <a:rPr lang="en-US" sz="1050" dirty="0">
@@ -14266,7 +14266,7 @@
                 <a:ea typeface="Courier New" pitchFamily="34" charset="-122"/>
                 <a:cs typeface="Courier New" pitchFamily="34" charset="-120"/>
               </a:rPr>
-              <a:t>     </a:t>
+              <a:t>    </a:t>
             </a:r>
             <a:r>
               <a:rPr lang="en-US" sz="1050" dirty="0">
@@ -14299,7 +14299,7 @@
                 <a:ea typeface="Courier New" pitchFamily="34" charset="-122"/>
                 <a:cs typeface="Courier New" pitchFamily="34" charset="-120"/>
               </a:rPr>
-              <a:t>LastName</a:t>
+              <a:t>QtdeItemPedido</a:t>
             </a:r>
             <a:r>
               <a:rPr lang="en-US" sz="1050" dirty="0">
@@ -14374,7 +14374,7 @@
                 <a:ea typeface="Courier New" pitchFamily="34" charset="-122"/>
                 <a:cs typeface="Courier New" pitchFamily="34" charset="-120"/>
               </a:rPr>
-              <a:t>'CurrencyCode'</a:t>
+              <a:t>'Currency'</a:t>
             </a:r>
             <a:endParaRPr lang="en-US" sz="1050" dirty="0"/>
           </a:p>
@@ -14405,7 +14405,7 @@
                 <a:ea typeface="Courier New" pitchFamily="34" charset="-122"/>
                 <a:cs typeface="Courier New" pitchFamily="34" charset="-120"/>
               </a:rPr>
-              <a:t>annual_salary</a:t>
+              <a:t>valor_total</a:t>
             </a:r>
             <a:r>
               <a:rPr lang="en-US" sz="1050" dirty="0">
@@ -14416,40 +14416,40 @@
                 <a:ea typeface="Courier New" pitchFamily="34" charset="-122"/>
                 <a:cs typeface="Courier New" pitchFamily="34" charset="-120"/>
               </a:rPr>
+              <a:t>         </a:t>
+            </a:r>
+            <a:r>
+              <a:rPr lang="en-US" sz="1050" dirty="0">
+                <a:solidFill>
+                  <a:srgbClr val="569CD6"/>
+                </a:solidFill>
+                <a:latin typeface="Courier New" pitchFamily="34" charset="0"/>
+                <a:ea typeface="Courier New" pitchFamily="34" charset="-122"/>
+                <a:cs typeface="Courier New" pitchFamily="34" charset="-120"/>
+              </a:rPr>
+              <a:t>as</a:t>
+            </a:r>
+            <a:r>
+              <a:rPr lang="en-US" sz="1050" dirty="0">
+                <a:solidFill>
+                  <a:srgbClr val="CCCCCC"/>
+                </a:solidFill>
+                <a:latin typeface="Courier New" pitchFamily="34" charset="0"/>
+                <a:ea typeface="Courier New" pitchFamily="34" charset="-122"/>
+                <a:cs typeface="Courier New" pitchFamily="34" charset="-120"/>
+              </a:rPr>
               <a:t> </a:t>
             </a:r>
             <a:r>
               <a:rPr lang="en-US" sz="1050" dirty="0">
                 <a:solidFill>
-                  <a:srgbClr val="569CD6"/>
-                </a:solidFill>
-                <a:latin typeface="Courier New" pitchFamily="34" charset="0"/>
-                <a:ea typeface="Courier New" pitchFamily="34" charset="-122"/>
-                <a:cs typeface="Courier New" pitchFamily="34" charset="-120"/>
-              </a:rPr>
-              <a:t>as</a:t>
-            </a:r>
-            <a:r>
-              <a:rPr lang="en-US" sz="1050" dirty="0">
-                <a:solidFill>
                   <a:srgbClr val="CCCCCC"/>
                 </a:solidFill>
                 <a:latin typeface="Courier New" pitchFamily="34" charset="0"/>
                 <a:ea typeface="Courier New" pitchFamily="34" charset="-122"/>
                 <a:cs typeface="Courier New" pitchFamily="34" charset="-120"/>
               </a:rPr>
-              <a:t> </a:t>
-            </a:r>
-            <a:r>
-              <a:rPr lang="en-US" sz="1050" dirty="0">
-                <a:solidFill>
-                  <a:srgbClr val="CCCCCC"/>
-                </a:solidFill>
-                <a:latin typeface="Courier New" pitchFamily="34" charset="0"/>
-                <a:ea typeface="Courier New" pitchFamily="34" charset="-122"/>
-                <a:cs typeface="Courier New" pitchFamily="34" charset="-120"/>
-              </a:rPr>
-              <a:t>AnnualSalary</a:t>
+              <a:t>ValorTotal</a:t>
             </a:r>
             <a:r>
               <a:rPr lang="en-US" sz="1050" dirty="0">
@@ -14491,7 +14491,7 @@
                 <a:ea typeface="Courier New" pitchFamily="34" charset="-122"/>
                 <a:cs typeface="Courier New" pitchFamily="34" charset="-120"/>
               </a:rPr>
-              <a:t>currency_code</a:t>
+              <a:t>currency</a:t>
             </a:r>
             <a:r>
               <a:rPr lang="en-US" sz="1050" dirty="0">
@@ -14502,40 +14502,40 @@
                 <a:ea typeface="Courier New" pitchFamily="34" charset="-122"/>
                 <a:cs typeface="Courier New" pitchFamily="34" charset="-120"/>
               </a:rPr>
+              <a:t>            </a:t>
+            </a:r>
+            <a:r>
+              <a:rPr lang="en-US" sz="1050" dirty="0">
+                <a:solidFill>
+                  <a:srgbClr val="569CD6"/>
+                </a:solidFill>
+                <a:latin typeface="Courier New" pitchFamily="34" charset="0"/>
+                <a:ea typeface="Courier New" pitchFamily="34" charset="-122"/>
+                <a:cs typeface="Courier New" pitchFamily="34" charset="-120"/>
+              </a:rPr>
+              <a:t>as</a:t>
+            </a:r>
+            <a:r>
+              <a:rPr lang="en-US" sz="1050" dirty="0">
+                <a:solidFill>
+                  <a:srgbClr val="CCCCCC"/>
+                </a:solidFill>
+                <a:latin typeface="Courier New" pitchFamily="34" charset="0"/>
+                <a:ea typeface="Courier New" pitchFamily="34" charset="-122"/>
+                <a:cs typeface="Courier New" pitchFamily="34" charset="-120"/>
+              </a:rPr>
               <a:t> </a:t>
             </a:r>
             <a:r>
               <a:rPr lang="en-US" sz="1050" dirty="0">
                 <a:solidFill>
-                  <a:srgbClr val="569CD6"/>
-                </a:solidFill>
-                <a:latin typeface="Courier New" pitchFamily="34" charset="0"/>
-                <a:ea typeface="Courier New" pitchFamily="34" charset="-122"/>
-                <a:cs typeface="Courier New" pitchFamily="34" charset="-120"/>
-              </a:rPr>
-              <a:t>as</a:t>
-            </a:r>
-            <a:r>
-              <a:rPr lang="en-US" sz="1050" dirty="0">
-                <a:solidFill>
                   <a:srgbClr val="CCCCCC"/>
                 </a:solidFill>
                 <a:latin typeface="Courier New" pitchFamily="34" charset="0"/>
                 <a:ea typeface="Courier New" pitchFamily="34" charset="-122"/>
                 <a:cs typeface="Courier New" pitchFamily="34" charset="-120"/>
               </a:rPr>
-              <a:t> </a:t>
-            </a:r>
-            <a:r>
-              <a:rPr lang="en-US" sz="1050" dirty="0">
-                <a:solidFill>
-                  <a:srgbClr val="CCCCCC"/>
-                </a:solidFill>
-                <a:latin typeface="Courier New" pitchFamily="34" charset="0"/>
-                <a:ea typeface="Courier New" pitchFamily="34" charset="-122"/>
-                <a:cs typeface="Courier New" pitchFamily="34" charset="-120"/>
-              </a:rPr>
-              <a:t>CurrencyCode</a:t>
+              <a:t>Currency</a:t>
             </a:r>
             <a:endParaRPr lang="en-US" sz="1050" dirty="0"/>
           </a:p>
@@ -14712,7 +14712,7 @@
                 <a:ea typeface="Courier New" pitchFamily="34" charset="-122"/>
                 <a:cs typeface="Courier New" pitchFamily="34" charset="-120"/>
               </a:rPr>
-              <a:t>Z00_C_EMPLOYEE</a:t>
+              <a:t>ZR_PC_ITEM_PEDIDO</a:t>
             </a:r>
             <a:r>
               <a:rPr lang="en-US" sz="1050" dirty="0">
